--- a/9.Deep_learning/class/in1class/1ann/class_1_module_9_deep learning__introduction.pptx
+++ b/9.Deep_learning/class/in1class/1ann/class_1_module_9_deep learning__introduction.pptx
@@ -10929,7 +10929,7 @@
         </p:blipFill>
         <p:spPr>
           <a:xfrm>
-            <a:off x="3968115" y="635"/>
+            <a:off x="3968115" y="13970"/>
             <a:ext cx="8507095" cy="6858000"/>
           </a:xfrm>
           <a:prstGeom prst="rect">
